--- a/SupplFigure2/Supplementary_Figure2.pptx
+++ b/SupplFigure2/Supplementary_Figure2.pptx
@@ -104,6 +104,11 @@
       </a:defRPr>
     </a:lvl9pPr>
   </p:defaultTextStyle>
+  <p:extLst>
+    <p:ext uri="{EFAFB233-063F-42B5-8137-9DF3F51BA10A}">
+      <p15:sldGuideLst xmlns:p15="http://schemas.microsoft.com/office/powerpoint/2012/main"/>
+    </p:ext>
+  </p:extLst>
 </p:presentation>
 </file>
 
@@ -238,7 +243,7 @@
           <a:p>
             <a:fld id="{12EF1360-BF5A-434C-94B0-AF2961DCE4C8}" type="datetimeFigureOut">
               <a:rPr lang="en-US" smtClean="0"/>
-              <a:t>03/24/25</a:t>
+              <a:t>02/17/26</a:t>
             </a:fld>
             <a:endParaRPr lang="en-US"/>
           </a:p>
@@ -408,7 +413,7 @@
           <a:p>
             <a:fld id="{12EF1360-BF5A-434C-94B0-AF2961DCE4C8}" type="datetimeFigureOut">
               <a:rPr lang="en-US" smtClean="0"/>
-              <a:t>03/24/25</a:t>
+              <a:t>02/17/26</a:t>
             </a:fld>
             <a:endParaRPr lang="en-US"/>
           </a:p>
@@ -588,7 +593,7 @@
           <a:p>
             <a:fld id="{12EF1360-BF5A-434C-94B0-AF2961DCE4C8}" type="datetimeFigureOut">
               <a:rPr lang="en-US" smtClean="0"/>
-              <a:t>03/24/25</a:t>
+              <a:t>02/17/26</a:t>
             </a:fld>
             <a:endParaRPr lang="en-US"/>
           </a:p>
@@ -758,7 +763,7 @@
           <a:p>
             <a:fld id="{12EF1360-BF5A-434C-94B0-AF2961DCE4C8}" type="datetimeFigureOut">
               <a:rPr lang="en-US" smtClean="0"/>
-              <a:t>03/24/25</a:t>
+              <a:t>02/17/26</a:t>
             </a:fld>
             <a:endParaRPr lang="en-US"/>
           </a:p>
@@ -1004,7 +1009,7 @@
           <a:p>
             <a:fld id="{12EF1360-BF5A-434C-94B0-AF2961DCE4C8}" type="datetimeFigureOut">
               <a:rPr lang="en-US" smtClean="0"/>
-              <a:t>03/24/25</a:t>
+              <a:t>02/17/26</a:t>
             </a:fld>
             <a:endParaRPr lang="en-US"/>
           </a:p>
@@ -1236,7 +1241,7 @@
           <a:p>
             <a:fld id="{12EF1360-BF5A-434C-94B0-AF2961DCE4C8}" type="datetimeFigureOut">
               <a:rPr lang="en-US" smtClean="0"/>
-              <a:t>03/24/25</a:t>
+              <a:t>02/17/26</a:t>
             </a:fld>
             <a:endParaRPr lang="en-US"/>
           </a:p>
@@ -1603,7 +1608,7 @@
           <a:p>
             <a:fld id="{12EF1360-BF5A-434C-94B0-AF2961DCE4C8}" type="datetimeFigureOut">
               <a:rPr lang="en-US" smtClean="0"/>
-              <a:t>03/24/25</a:t>
+              <a:t>02/17/26</a:t>
             </a:fld>
             <a:endParaRPr lang="en-US"/>
           </a:p>
@@ -1721,7 +1726,7 @@
           <a:p>
             <a:fld id="{12EF1360-BF5A-434C-94B0-AF2961DCE4C8}" type="datetimeFigureOut">
               <a:rPr lang="en-US" smtClean="0"/>
-              <a:t>03/24/25</a:t>
+              <a:t>02/17/26</a:t>
             </a:fld>
             <a:endParaRPr lang="en-US"/>
           </a:p>
@@ -1816,7 +1821,7 @@
           <a:p>
             <a:fld id="{12EF1360-BF5A-434C-94B0-AF2961DCE4C8}" type="datetimeFigureOut">
               <a:rPr lang="en-US" smtClean="0"/>
-              <a:t>03/24/25</a:t>
+              <a:t>02/17/26</a:t>
             </a:fld>
             <a:endParaRPr lang="en-US"/>
           </a:p>
@@ -2093,7 +2098,7 @@
           <a:p>
             <a:fld id="{12EF1360-BF5A-434C-94B0-AF2961DCE4C8}" type="datetimeFigureOut">
               <a:rPr lang="en-US" smtClean="0"/>
-              <a:t>03/24/25</a:t>
+              <a:t>02/17/26</a:t>
             </a:fld>
             <a:endParaRPr lang="en-US"/>
           </a:p>
@@ -2350,7 +2355,7 @@
           <a:p>
             <a:fld id="{12EF1360-BF5A-434C-94B0-AF2961DCE4C8}" type="datetimeFigureOut">
               <a:rPr lang="en-US" smtClean="0"/>
-              <a:t>03/24/25</a:t>
+              <a:t>02/17/26</a:t>
             </a:fld>
             <a:endParaRPr lang="en-US"/>
           </a:p>
@@ -2563,7 +2568,7 @@
           <a:p>
             <a:fld id="{12EF1360-BF5A-434C-94B0-AF2961DCE4C8}" type="datetimeFigureOut">
               <a:rPr lang="en-US" smtClean="0"/>
-              <a:t>03/24/25</a:t>
+              <a:t>02/17/26</a:t>
             </a:fld>
             <a:endParaRPr lang="en-US"/>
           </a:p>
@@ -2970,10 +2975,10 @@
       </p:grpSpPr>
       <p:pic>
         <p:nvPicPr>
-          <p:cNvPr id="7" name="Graphic 6">
+          <p:cNvPr id="3" name="Graphic 2">
             <a:extLst>
               <a:ext uri="{FF2B5EF4-FFF2-40B4-BE49-F238E27FC236}">
-                <a16:creationId xmlns:a16="http://schemas.microsoft.com/office/drawing/2014/main" id="{B255198D-B8F6-72F2-CF5A-5234C1D87152}"/>
+                <a16:creationId xmlns:a16="http://schemas.microsoft.com/office/drawing/2014/main" id="{EFC931F3-32AB-4561-DD5B-EFB91CE53332}"/>
               </a:ext>
             </a:extLst>
           </p:cNvPr>
@@ -2996,8 +3001,8 @@
         </p:blipFill>
         <p:spPr>
           <a:xfrm>
-            <a:off x="52638" y="0"/>
-            <a:ext cx="7209924" cy="6858000"/>
+            <a:off x="0" y="128346"/>
+            <a:ext cx="7315200" cy="6601307"/>
           </a:xfrm>
           <a:prstGeom prst="rect">
             <a:avLst/>
